--- a/main/chapter4/figures/范式对比图.pptx
+++ b/main/chapter4/figures/范式对比图.pptx
@@ -5,7 +5,7 @@
     <p:sldMasterId id="2147483648" r:id="rId1"/>
   </p:sldMasterIdLst>
   <p:sldIdLst>
-    <p:sldId id="256" r:id="rId2"/>
+    <p:sldId id="257" r:id="rId2"/>
   </p:sldIdLst>
   <p:sldSz cx="12192000" cy="6858000"/>
   <p:notesSz cx="6858000" cy="9144000"/>
@@ -104,6 +104,11 @@
       </a:defRPr>
     </a:lvl9pPr>
   </p:defaultTextStyle>
+  <p:extLst>
+    <p:ext uri="{EFAFB233-063F-42B5-8137-9DF3F51BA10A}">
+      <p15:sldGuideLst xmlns:p15="http://schemas.microsoft.com/office/powerpoint/2012/main"/>
+    </p:ext>
+  </p:extLst>
 </p:presentation>
 </file>
 
@@ -254,7 +259,7 @@
           <a:p>
             <a:fld id="{7D7A7DA3-2D2C-9B4F-9237-51F85B21BD7E}" type="datetimeFigureOut">
               <a:rPr kumimoji="1" lang="zh-CN" altLang="en-US" smtClean="0"/>
-              <a:t>2026/3/4</a:t>
+              <a:t>2026/3/29</a:t>
             </a:fld>
             <a:endParaRPr kumimoji="1" lang="zh-CN" altLang="en-US"/>
           </a:p>
@@ -452,7 +457,7 @@
           <a:p>
             <a:fld id="{7D7A7DA3-2D2C-9B4F-9237-51F85B21BD7E}" type="datetimeFigureOut">
               <a:rPr kumimoji="1" lang="zh-CN" altLang="en-US" smtClean="0"/>
-              <a:t>2026/3/4</a:t>
+              <a:t>2026/3/29</a:t>
             </a:fld>
             <a:endParaRPr kumimoji="1" lang="zh-CN" altLang="en-US"/>
           </a:p>
@@ -660,7 +665,7 @@
           <a:p>
             <a:fld id="{7D7A7DA3-2D2C-9B4F-9237-51F85B21BD7E}" type="datetimeFigureOut">
               <a:rPr kumimoji="1" lang="zh-CN" altLang="en-US" smtClean="0"/>
-              <a:t>2026/3/4</a:t>
+              <a:t>2026/3/29</a:t>
             </a:fld>
             <a:endParaRPr kumimoji="1" lang="zh-CN" altLang="en-US"/>
           </a:p>
@@ -858,7 +863,7 @@
           <a:p>
             <a:fld id="{7D7A7DA3-2D2C-9B4F-9237-51F85B21BD7E}" type="datetimeFigureOut">
               <a:rPr kumimoji="1" lang="zh-CN" altLang="en-US" smtClean="0"/>
-              <a:t>2026/3/4</a:t>
+              <a:t>2026/3/29</a:t>
             </a:fld>
             <a:endParaRPr kumimoji="1" lang="zh-CN" altLang="en-US"/>
           </a:p>
@@ -1133,7 +1138,7 @@
           <a:p>
             <a:fld id="{7D7A7DA3-2D2C-9B4F-9237-51F85B21BD7E}" type="datetimeFigureOut">
               <a:rPr kumimoji="1" lang="zh-CN" altLang="en-US" smtClean="0"/>
-              <a:t>2026/3/4</a:t>
+              <a:t>2026/3/29</a:t>
             </a:fld>
             <a:endParaRPr kumimoji="1" lang="zh-CN" altLang="en-US"/>
           </a:p>
@@ -1398,7 +1403,7 @@
           <a:p>
             <a:fld id="{7D7A7DA3-2D2C-9B4F-9237-51F85B21BD7E}" type="datetimeFigureOut">
               <a:rPr kumimoji="1" lang="zh-CN" altLang="en-US" smtClean="0"/>
-              <a:t>2026/3/4</a:t>
+              <a:t>2026/3/29</a:t>
             </a:fld>
             <a:endParaRPr kumimoji="1" lang="zh-CN" altLang="en-US"/>
           </a:p>
@@ -1810,7 +1815,7 @@
           <a:p>
             <a:fld id="{7D7A7DA3-2D2C-9B4F-9237-51F85B21BD7E}" type="datetimeFigureOut">
               <a:rPr kumimoji="1" lang="zh-CN" altLang="en-US" smtClean="0"/>
-              <a:t>2026/3/4</a:t>
+              <a:t>2026/3/29</a:t>
             </a:fld>
             <a:endParaRPr kumimoji="1" lang="zh-CN" altLang="en-US"/>
           </a:p>
@@ -1951,7 +1956,7 @@
           <a:p>
             <a:fld id="{7D7A7DA3-2D2C-9B4F-9237-51F85B21BD7E}" type="datetimeFigureOut">
               <a:rPr kumimoji="1" lang="zh-CN" altLang="en-US" smtClean="0"/>
-              <a:t>2026/3/4</a:t>
+              <a:t>2026/3/29</a:t>
             </a:fld>
             <a:endParaRPr kumimoji="1" lang="zh-CN" altLang="en-US"/>
           </a:p>
@@ -2064,7 +2069,7 @@
           <a:p>
             <a:fld id="{7D7A7DA3-2D2C-9B4F-9237-51F85B21BD7E}" type="datetimeFigureOut">
               <a:rPr kumimoji="1" lang="zh-CN" altLang="en-US" smtClean="0"/>
-              <a:t>2026/3/4</a:t>
+              <a:t>2026/3/29</a:t>
             </a:fld>
             <a:endParaRPr kumimoji="1" lang="zh-CN" altLang="en-US"/>
           </a:p>
@@ -2375,7 +2380,7 @@
           <a:p>
             <a:fld id="{7D7A7DA3-2D2C-9B4F-9237-51F85B21BD7E}" type="datetimeFigureOut">
               <a:rPr kumimoji="1" lang="zh-CN" altLang="en-US" smtClean="0"/>
-              <a:t>2026/3/4</a:t>
+              <a:t>2026/3/29</a:t>
             </a:fld>
             <a:endParaRPr kumimoji="1" lang="zh-CN" altLang="en-US"/>
           </a:p>
@@ -2663,7 +2668,7 @@
           <a:p>
             <a:fld id="{7D7A7DA3-2D2C-9B4F-9237-51F85B21BD7E}" type="datetimeFigureOut">
               <a:rPr kumimoji="1" lang="zh-CN" altLang="en-US" smtClean="0"/>
-              <a:t>2026/3/4</a:t>
+              <a:t>2026/3/29</a:t>
             </a:fld>
             <a:endParaRPr kumimoji="1" lang="zh-CN" altLang="en-US"/>
           </a:p>
@@ -2904,7 +2909,7 @@
           <a:p>
             <a:fld id="{7D7A7DA3-2D2C-9B4F-9237-51F85B21BD7E}" type="datetimeFigureOut">
               <a:rPr kumimoji="1" lang="zh-CN" altLang="en-US" smtClean="0"/>
-              <a:t>2026/3/4</a:t>
+              <a:t>2026/3/29</a:t>
             </a:fld>
             <a:endParaRPr kumimoji="1" lang="zh-CN" altLang="en-US"/>
           </a:p>
@@ -3321,12 +3326,1189 @@
           <a:chExt cx="0" cy="0"/>
         </a:xfrm>
       </p:grpSpPr>
+      <p:sp>
+        <p:nvSpPr>
+          <p:cNvPr id="199" name="矩形 198">
+            <a:extLst>
+              <a:ext uri="{FF2B5EF4-FFF2-40B4-BE49-F238E27FC236}">
+                <a16:creationId xmlns:a16="http://schemas.microsoft.com/office/drawing/2014/main" id="{E5511B09-F950-3347-81A2-E523A241B9B6}"/>
+              </a:ext>
+            </a:extLst>
+          </p:cNvPr>
+          <p:cNvSpPr/>
+          <p:nvPr/>
+        </p:nvSpPr>
+        <p:spPr>
+          <a:xfrm>
+            <a:off x="2404085" y="1003890"/>
+            <a:ext cx="6571626" cy="1557947"/>
+          </a:xfrm>
+          <a:prstGeom prst="rect">
+            <a:avLst/>
+          </a:prstGeom>
+          <a:solidFill>
+            <a:schemeClr val="accent1">
+              <a:lumMod val="20000"/>
+              <a:lumOff val="80000"/>
+            </a:schemeClr>
+          </a:solidFill>
+          <a:ln w="19050">
+            <a:noFill/>
+            <a:prstDash val="lgDash"/>
+          </a:ln>
+        </p:spPr>
+        <p:style>
+          <a:lnRef idx="2">
+            <a:schemeClr val="accent1">
+              <a:shade val="50000"/>
+            </a:schemeClr>
+          </a:lnRef>
+          <a:fillRef idx="1">
+            <a:schemeClr val="accent1"/>
+          </a:fillRef>
+          <a:effectRef idx="0">
+            <a:schemeClr val="accent1"/>
+          </a:effectRef>
+          <a:fontRef idx="minor">
+            <a:schemeClr val="lt1"/>
+          </a:fontRef>
+        </p:style>
+        <p:txBody>
+          <a:bodyPr rtlCol="0" anchor="ctr"/>
+          <a:lstStyle/>
+          <a:p>
+            <a:pPr algn="ctr"/>
+            <a:endParaRPr kumimoji="1" lang="zh-CN" altLang="en-US"/>
+          </a:p>
+        </p:txBody>
+      </p:sp>
+      <p:sp>
+        <p:nvSpPr>
+          <p:cNvPr id="200" name="矩形 199">
+            <a:extLst>
+              <a:ext uri="{FF2B5EF4-FFF2-40B4-BE49-F238E27FC236}">
+                <a16:creationId xmlns:a16="http://schemas.microsoft.com/office/drawing/2014/main" id="{1F266106-E1B9-7E4C-986F-536055C72BCB}"/>
+              </a:ext>
+            </a:extLst>
+          </p:cNvPr>
+          <p:cNvSpPr/>
+          <p:nvPr/>
+        </p:nvSpPr>
+        <p:spPr>
+          <a:xfrm>
+            <a:off x="2404085" y="3149937"/>
+            <a:ext cx="6571626" cy="1535167"/>
+          </a:xfrm>
+          <a:prstGeom prst="rect">
+            <a:avLst/>
+          </a:prstGeom>
+          <a:solidFill>
+            <a:schemeClr val="accent1">
+              <a:lumMod val="20000"/>
+              <a:lumOff val="80000"/>
+            </a:schemeClr>
+          </a:solidFill>
+          <a:ln w="19050">
+            <a:noFill/>
+            <a:prstDash val="lgDash"/>
+          </a:ln>
+        </p:spPr>
+        <p:style>
+          <a:lnRef idx="2">
+            <a:schemeClr val="accent1">
+              <a:shade val="50000"/>
+            </a:schemeClr>
+          </a:lnRef>
+          <a:fillRef idx="1">
+            <a:schemeClr val="accent1"/>
+          </a:fillRef>
+          <a:effectRef idx="0">
+            <a:schemeClr val="accent1"/>
+          </a:effectRef>
+          <a:fontRef idx="minor">
+            <a:schemeClr val="lt1"/>
+          </a:fontRef>
+        </p:style>
+        <p:txBody>
+          <a:bodyPr rtlCol="0" anchor="ctr"/>
+          <a:lstStyle/>
+          <a:p>
+            <a:pPr algn="ctr"/>
+            <a:endParaRPr kumimoji="1" lang="zh-CN" altLang="en-US"/>
+          </a:p>
+        </p:txBody>
+      </p:sp>
+      <p:sp>
+        <p:nvSpPr>
+          <p:cNvPr id="4" name="圆角矩形 3">
+            <a:extLst>
+              <a:ext uri="{FF2B5EF4-FFF2-40B4-BE49-F238E27FC236}">
+                <a16:creationId xmlns:a16="http://schemas.microsoft.com/office/drawing/2014/main" id="{72296413-CEAF-644B-B174-B0A20E2A4A19}"/>
+              </a:ext>
+            </a:extLst>
+          </p:cNvPr>
+          <p:cNvSpPr/>
+          <p:nvPr/>
+        </p:nvSpPr>
+        <p:spPr>
+          <a:xfrm>
+            <a:off x="3207059" y="1280417"/>
+            <a:ext cx="1641076" cy="676778"/>
+          </a:xfrm>
+          <a:prstGeom prst="roundRect">
+            <a:avLst/>
+          </a:prstGeom>
+          <a:solidFill>
+            <a:srgbClr val="F8CEB1"/>
+          </a:solidFill>
+          <a:ln>
+            <a:solidFill>
+              <a:schemeClr val="tx1">
+                <a:lumMod val="50000"/>
+                <a:lumOff val="50000"/>
+              </a:schemeClr>
+            </a:solidFill>
+          </a:ln>
+        </p:spPr>
+        <p:style>
+          <a:lnRef idx="2">
+            <a:schemeClr val="accent1">
+              <a:shade val="50000"/>
+            </a:schemeClr>
+          </a:lnRef>
+          <a:fillRef idx="1">
+            <a:schemeClr val="accent1"/>
+          </a:fillRef>
+          <a:effectRef idx="0">
+            <a:schemeClr val="accent1"/>
+          </a:effectRef>
+          <a:fontRef idx="minor">
+            <a:schemeClr val="lt1"/>
+          </a:fontRef>
+        </p:style>
+        <p:txBody>
+          <a:bodyPr rtlCol="0" anchor="ctr"/>
+          <a:lstStyle/>
+          <a:p>
+            <a:pPr algn="ctr"/>
+            <a:r>
+              <a:rPr kumimoji="1" lang="en-US" altLang="zh-CN" dirty="0">
+                <a:solidFill>
+                  <a:schemeClr val="tx1"/>
+                </a:solidFill>
+                <a:latin typeface="Times New Roman" panose="02020603050405020304" pitchFamily="18" charset="0"/>
+                <a:ea typeface="SimSun" panose="02010600030101010101" pitchFamily="2" charset="-122"/>
+                <a:cs typeface="Times New Roman" panose="02020603050405020304" pitchFamily="18" charset="0"/>
+              </a:rPr>
+              <a:t>VLM-1</a:t>
+            </a:r>
+          </a:p>
+        </p:txBody>
+      </p:sp>
+      <p:sp>
+        <p:nvSpPr>
+          <p:cNvPr id="5" name="圆角矩形 4">
+            <a:extLst>
+              <a:ext uri="{FF2B5EF4-FFF2-40B4-BE49-F238E27FC236}">
+                <a16:creationId xmlns:a16="http://schemas.microsoft.com/office/drawing/2014/main" id="{669CDFEB-A49B-A34E-89F1-BE6EBB21A47E}"/>
+              </a:ext>
+            </a:extLst>
+          </p:cNvPr>
+          <p:cNvSpPr/>
+          <p:nvPr/>
+        </p:nvSpPr>
+        <p:spPr>
+          <a:xfrm>
+            <a:off x="5849737" y="1216106"/>
+            <a:ext cx="1560138" cy="805399"/>
+          </a:xfrm>
+          <a:prstGeom prst="roundRect">
+            <a:avLst/>
+          </a:prstGeom>
+          <a:solidFill>
+            <a:srgbClr val="D9EDC8"/>
+          </a:solidFill>
+          <a:ln>
+            <a:solidFill>
+              <a:schemeClr val="tx1">
+                <a:lumMod val="50000"/>
+                <a:lumOff val="50000"/>
+              </a:schemeClr>
+            </a:solidFill>
+          </a:ln>
+        </p:spPr>
+        <p:style>
+          <a:lnRef idx="2">
+            <a:schemeClr val="accent1">
+              <a:shade val="50000"/>
+            </a:schemeClr>
+          </a:lnRef>
+          <a:fillRef idx="1">
+            <a:schemeClr val="accent1"/>
+          </a:fillRef>
+          <a:effectRef idx="0">
+            <a:schemeClr val="accent1"/>
+          </a:effectRef>
+          <a:fontRef idx="minor">
+            <a:schemeClr val="lt1"/>
+          </a:fontRef>
+        </p:style>
+        <p:txBody>
+          <a:bodyPr rtlCol="0" anchor="ctr"/>
+          <a:lstStyle/>
+          <a:p>
+            <a:pPr algn="ctr"/>
+            <a:r>
+              <a:rPr kumimoji="1" lang="en-US" altLang="zh-CN" dirty="0">
+                <a:solidFill>
+                  <a:schemeClr val="tx1"/>
+                </a:solidFill>
+                <a:latin typeface="Times New Roman" panose="02020603050405020304" pitchFamily="18" charset="0"/>
+                <a:ea typeface="SimSun" panose="02010600030101010101" pitchFamily="2" charset="-122"/>
+                <a:cs typeface="Times New Roman" panose="02020603050405020304" pitchFamily="18" charset="0"/>
+              </a:rPr>
+              <a:t>VLM-2</a:t>
+            </a:r>
+          </a:p>
+          <a:p>
+            <a:pPr algn="ctr"/>
+            <a:r>
+              <a:rPr kumimoji="1" lang="zh-CN" altLang="en-US" dirty="0">
+                <a:solidFill>
+                  <a:schemeClr val="tx1"/>
+                </a:solidFill>
+                <a:latin typeface="Times New Roman" panose="02020603050405020304" pitchFamily="18" charset="0"/>
+                <a:ea typeface="SimSun" panose="02010600030101010101" pitchFamily="2" charset="-122"/>
+                <a:cs typeface="Times New Roman" panose="02020603050405020304" pitchFamily="18" charset="0"/>
+              </a:rPr>
+              <a:t>（微调）</a:t>
+            </a:r>
+            <a:endParaRPr kumimoji="1" lang="en-US" altLang="zh-CN" dirty="0">
+              <a:solidFill>
+                <a:schemeClr val="tx1"/>
+              </a:solidFill>
+              <a:latin typeface="Times New Roman" panose="02020603050405020304" pitchFamily="18" charset="0"/>
+              <a:ea typeface="SimSun" panose="02010600030101010101" pitchFamily="2" charset="-122"/>
+              <a:cs typeface="Times New Roman" panose="02020603050405020304" pitchFamily="18" charset="0"/>
+            </a:endParaRPr>
+          </a:p>
+        </p:txBody>
+      </p:sp>
       <p:pic>
         <p:nvPicPr>
-          <p:cNvPr id="4" name="图片 3">
-            <a:extLst>
-              <a:ext uri="{FF2B5EF4-FFF2-40B4-BE49-F238E27FC236}">
-                <a16:creationId xmlns:a16="http://schemas.microsoft.com/office/drawing/2014/main" id="{A6585E2A-B9F9-0147-81F4-3AD5FA9CB3D6}"/>
+          <p:cNvPr id="16" name="图片 15">
+            <a:extLst>
+              <a:ext uri="{FF2B5EF4-FFF2-40B4-BE49-F238E27FC236}">
+                <a16:creationId xmlns:a16="http://schemas.microsoft.com/office/drawing/2014/main" id="{093D4378-3181-E943-B2DF-BEC7F55F898A}"/>
+              </a:ext>
+            </a:extLst>
+          </p:cNvPr>
+          <p:cNvPicPr>
+            <a:picLocks noChangeAspect="1"/>
+          </p:cNvPicPr>
+          <p:nvPr/>
+        </p:nvPicPr>
+        <p:blipFill rotWithShape="1">
+          <a:blip r:embed="rId2"/>
+          <a:srcRect l="16343"/>
+          <a:stretch/>
+        </p:blipFill>
+        <p:spPr>
+          <a:xfrm>
+            <a:off x="428869" y="1752241"/>
+            <a:ext cx="1718666" cy="2054437"/>
+          </a:xfrm>
+          <a:prstGeom prst="rect">
+            <a:avLst/>
+          </a:prstGeom>
+        </p:spPr>
+      </p:pic>
+      <p:sp>
+        <p:nvSpPr>
+          <p:cNvPr id="29" name="圆角矩形 28">
+            <a:extLst>
+              <a:ext uri="{FF2B5EF4-FFF2-40B4-BE49-F238E27FC236}">
+                <a16:creationId xmlns:a16="http://schemas.microsoft.com/office/drawing/2014/main" id="{BF6A6B31-FF9D-0C41-A56D-47E0AADFD47D}"/>
+              </a:ext>
+            </a:extLst>
+          </p:cNvPr>
+          <p:cNvSpPr/>
+          <p:nvPr/>
+        </p:nvSpPr>
+        <p:spPr>
+          <a:xfrm>
+            <a:off x="5768799" y="3548672"/>
+            <a:ext cx="1641076" cy="805399"/>
+          </a:xfrm>
+          <a:prstGeom prst="roundRect">
+            <a:avLst/>
+          </a:prstGeom>
+          <a:solidFill>
+            <a:srgbClr val="D9EDC8"/>
+          </a:solidFill>
+        </p:spPr>
+        <p:style>
+          <a:lnRef idx="2">
+            <a:schemeClr val="accent1">
+              <a:shade val="50000"/>
+            </a:schemeClr>
+          </a:lnRef>
+          <a:fillRef idx="1">
+            <a:schemeClr val="accent1"/>
+          </a:fillRef>
+          <a:effectRef idx="0">
+            <a:schemeClr val="accent1"/>
+          </a:effectRef>
+          <a:fontRef idx="minor">
+            <a:schemeClr val="lt1"/>
+          </a:fontRef>
+        </p:style>
+        <p:txBody>
+          <a:bodyPr rtlCol="0" anchor="ctr"/>
+          <a:lstStyle/>
+          <a:p>
+            <a:pPr algn="ctr"/>
+            <a:r>
+              <a:rPr kumimoji="1" lang="en-US" altLang="zh-CN" dirty="0">
+                <a:solidFill>
+                  <a:schemeClr val="tx1"/>
+                </a:solidFill>
+                <a:latin typeface="Times New Roman" panose="02020603050405020304" pitchFamily="18" charset="0"/>
+                <a:ea typeface="SimSun" panose="02010600030101010101" pitchFamily="2" charset="-122"/>
+                <a:cs typeface="Times New Roman" panose="02020603050405020304" pitchFamily="18" charset="0"/>
+              </a:rPr>
+              <a:t>VLM</a:t>
+            </a:r>
+          </a:p>
+        </p:txBody>
+      </p:sp>
+      <p:sp>
+        <p:nvSpPr>
+          <p:cNvPr id="41" name="圆角矩形 40">
+            <a:extLst>
+              <a:ext uri="{FF2B5EF4-FFF2-40B4-BE49-F238E27FC236}">
+                <a16:creationId xmlns:a16="http://schemas.microsoft.com/office/drawing/2014/main" id="{DCB53BA1-E90B-3C40-9848-2FAF7F7BCE03}"/>
+              </a:ext>
+            </a:extLst>
+          </p:cNvPr>
+          <p:cNvSpPr/>
+          <p:nvPr/>
+        </p:nvSpPr>
+        <p:spPr>
+          <a:xfrm>
+            <a:off x="3118474" y="3615285"/>
+            <a:ext cx="1794748" cy="672175"/>
+          </a:xfrm>
+          <a:prstGeom prst="roundRect">
+            <a:avLst/>
+          </a:prstGeom>
+          <a:solidFill>
+            <a:srgbClr val="BFDFF7"/>
+          </a:solidFill>
+        </p:spPr>
+        <p:style>
+          <a:lnRef idx="2">
+            <a:schemeClr val="accent1">
+              <a:shade val="50000"/>
+            </a:schemeClr>
+          </a:lnRef>
+          <a:fillRef idx="1">
+            <a:schemeClr val="accent1"/>
+          </a:fillRef>
+          <a:effectRef idx="0">
+            <a:schemeClr val="accent1"/>
+          </a:effectRef>
+          <a:fontRef idx="minor">
+            <a:schemeClr val="lt1"/>
+          </a:fontRef>
+        </p:style>
+        <p:txBody>
+          <a:bodyPr rtlCol="0" anchor="ctr"/>
+          <a:lstStyle/>
+          <a:p>
+            <a:pPr algn="ctr"/>
+            <a:r>
+              <a:rPr kumimoji="1" lang="en-US" altLang="zh-CN" dirty="0">
+                <a:solidFill>
+                  <a:schemeClr val="tx1"/>
+                </a:solidFill>
+                <a:latin typeface="Times New Roman" panose="02020603050405020304" pitchFamily="18" charset="0"/>
+                <a:ea typeface="SimSun" panose="02010600030101010101" pitchFamily="2" charset="-122"/>
+                <a:cs typeface="Times New Roman" panose="02020603050405020304" pitchFamily="18" charset="0"/>
+              </a:rPr>
+              <a:t>SMPL</a:t>
+            </a:r>
+            <a:r>
+              <a:rPr kumimoji="1" lang="zh-CN" altLang="en-US" dirty="0">
+                <a:solidFill>
+                  <a:schemeClr val="tx1"/>
+                </a:solidFill>
+                <a:latin typeface="Times New Roman" panose="02020603050405020304" pitchFamily="18" charset="0"/>
+                <a:ea typeface="SimSun" panose="02010600030101010101" pitchFamily="2" charset="-122"/>
+                <a:cs typeface="Times New Roman" panose="02020603050405020304" pitchFamily="18" charset="0"/>
+              </a:rPr>
+              <a:t>测量先验</a:t>
+            </a:r>
+          </a:p>
+        </p:txBody>
+      </p:sp>
+      <p:sp>
+        <p:nvSpPr>
+          <p:cNvPr id="52" name="文本框 51">
+            <a:extLst>
+              <a:ext uri="{FF2B5EF4-FFF2-40B4-BE49-F238E27FC236}">
+                <a16:creationId xmlns:a16="http://schemas.microsoft.com/office/drawing/2014/main" id="{BF5207D5-5400-0E47-B57A-7E7F785833C6}"/>
+              </a:ext>
+            </a:extLst>
+          </p:cNvPr>
+          <p:cNvSpPr txBox="1"/>
+          <p:nvPr/>
+        </p:nvSpPr>
+        <p:spPr>
+          <a:xfrm>
+            <a:off x="4634158" y="1650895"/>
+            <a:ext cx="1387608" cy="584775"/>
+          </a:xfrm>
+          <a:prstGeom prst="rect">
+            <a:avLst/>
+          </a:prstGeom>
+          <a:noFill/>
+        </p:spPr>
+        <p:txBody>
+          <a:bodyPr wrap="square">
+            <a:spAutoFit/>
+          </a:bodyPr>
+          <a:lstStyle/>
+          <a:p>
+            <a:pPr algn="ctr"/>
+            <a:r>
+              <a:rPr kumimoji="1" lang="zh-CN" altLang="en-US" sz="1600" dirty="0">
+                <a:latin typeface="Times New Roman" panose="02020603050405020304" pitchFamily="18" charset="0"/>
+                <a:ea typeface="SimSun" panose="02010600030101010101" pitchFamily="2" charset="-122"/>
+                <a:cs typeface="Times New Roman" panose="02020603050405020304" pitchFamily="18" charset="0"/>
+              </a:rPr>
+              <a:t>服装类别</a:t>
+            </a:r>
+            <a:endParaRPr kumimoji="1" lang="en-US" altLang="zh-CN" sz="1600" dirty="0">
+              <a:latin typeface="Times New Roman" panose="02020603050405020304" pitchFamily="18" charset="0"/>
+              <a:ea typeface="SimSun" panose="02010600030101010101" pitchFamily="2" charset="-122"/>
+              <a:cs typeface="Times New Roman" panose="02020603050405020304" pitchFamily="18" charset="0"/>
+            </a:endParaRPr>
+          </a:p>
+          <a:p>
+            <a:pPr algn="ctr"/>
+            <a:r>
+              <a:rPr kumimoji="1" lang="zh-CN" altLang="en-US" sz="1600" dirty="0">
+                <a:latin typeface="Times New Roman" panose="02020603050405020304" pitchFamily="18" charset="0"/>
+                <a:ea typeface="SimSun" panose="02010600030101010101" pitchFamily="2" charset="-122"/>
+                <a:cs typeface="Times New Roman" panose="02020603050405020304" pitchFamily="18" charset="0"/>
+              </a:rPr>
+              <a:t>预测</a:t>
+            </a:r>
+          </a:p>
+        </p:txBody>
+      </p:sp>
+      <p:sp>
+        <p:nvSpPr>
+          <p:cNvPr id="56" name="文本框 55">
+            <a:extLst>
+              <a:ext uri="{FF2B5EF4-FFF2-40B4-BE49-F238E27FC236}">
+                <a16:creationId xmlns:a16="http://schemas.microsoft.com/office/drawing/2014/main" id="{474910EC-5A94-5B4E-8B2F-3E590BF74771}"/>
+              </a:ext>
+            </a:extLst>
+          </p:cNvPr>
+          <p:cNvSpPr txBox="1"/>
+          <p:nvPr/>
+        </p:nvSpPr>
+        <p:spPr>
+          <a:xfrm>
+            <a:off x="7315198" y="1632671"/>
+            <a:ext cx="1199015" cy="584775"/>
+          </a:xfrm>
+          <a:prstGeom prst="rect">
+            <a:avLst/>
+          </a:prstGeom>
+          <a:noFill/>
+        </p:spPr>
+        <p:txBody>
+          <a:bodyPr wrap="square">
+            <a:spAutoFit/>
+          </a:bodyPr>
+          <a:lstStyle/>
+          <a:p>
+            <a:pPr algn="ctr"/>
+            <a:r>
+              <a:rPr kumimoji="1" lang="zh-CN" altLang="en-US" sz="1600" dirty="0">
+                <a:latin typeface="Times New Roman" panose="02020603050405020304" pitchFamily="18" charset="0"/>
+                <a:ea typeface="SimSun" panose="02010600030101010101" pitchFamily="2" charset="-122"/>
+                <a:cs typeface="Times New Roman" panose="02020603050405020304" pitchFamily="18" charset="0"/>
+              </a:rPr>
+              <a:t>尺寸参数</a:t>
+            </a:r>
+            <a:endParaRPr kumimoji="1" lang="en-US" altLang="zh-CN" sz="1600" dirty="0">
+              <a:latin typeface="Times New Roman" panose="02020603050405020304" pitchFamily="18" charset="0"/>
+              <a:ea typeface="SimSun" panose="02010600030101010101" pitchFamily="2" charset="-122"/>
+              <a:cs typeface="Times New Roman" panose="02020603050405020304" pitchFamily="18" charset="0"/>
+            </a:endParaRPr>
+          </a:p>
+          <a:p>
+            <a:pPr algn="ctr"/>
+            <a:r>
+              <a:rPr kumimoji="1" lang="zh-CN" altLang="en-US" sz="1600" dirty="0">
+                <a:latin typeface="Times New Roman" panose="02020603050405020304" pitchFamily="18" charset="0"/>
+                <a:ea typeface="SimSun" panose="02010600030101010101" pitchFamily="2" charset="-122"/>
+                <a:cs typeface="Times New Roman" panose="02020603050405020304" pitchFamily="18" charset="0"/>
+              </a:rPr>
+              <a:t>回归</a:t>
+            </a:r>
+          </a:p>
+        </p:txBody>
+      </p:sp>
+      <p:cxnSp>
+        <p:nvCxnSpPr>
+          <p:cNvPr id="112" name="肘形连接符 111">
+            <a:extLst>
+              <a:ext uri="{FF2B5EF4-FFF2-40B4-BE49-F238E27FC236}">
+                <a16:creationId xmlns:a16="http://schemas.microsoft.com/office/drawing/2014/main" id="{20B4BA3D-5EB4-FD42-B205-64D1F99AE0CD}"/>
+              </a:ext>
+            </a:extLst>
+          </p:cNvPr>
+          <p:cNvCxnSpPr>
+            <a:cxnSpLocks/>
+            <a:stCxn id="16" idx="3"/>
+            <a:endCxn id="4" idx="1"/>
+          </p:cNvCxnSpPr>
+          <p:nvPr/>
+        </p:nvCxnSpPr>
+        <p:spPr>
+          <a:xfrm flipV="1">
+            <a:off x="2147535" y="1618806"/>
+            <a:ext cx="1059524" cy="1160654"/>
+          </a:xfrm>
+          <a:prstGeom prst="bentConnector3">
+            <a:avLst>
+              <a:gd name="adj1" fmla="val 50000"/>
+            </a:avLst>
+          </a:prstGeom>
+          <a:ln w="19050">
+            <a:solidFill>
+              <a:schemeClr val="accent1">
+                <a:lumMod val="50000"/>
+              </a:schemeClr>
+            </a:solidFill>
+            <a:tailEnd type="triangle"/>
+          </a:ln>
+        </p:spPr>
+        <p:style>
+          <a:lnRef idx="1">
+            <a:schemeClr val="accent1"/>
+          </a:lnRef>
+          <a:fillRef idx="0">
+            <a:schemeClr val="accent1"/>
+          </a:fillRef>
+          <a:effectRef idx="0">
+            <a:schemeClr val="accent1"/>
+          </a:effectRef>
+          <a:fontRef idx="minor">
+            <a:schemeClr val="tx1"/>
+          </a:fontRef>
+        </p:style>
+      </p:cxnSp>
+      <p:cxnSp>
+        <p:nvCxnSpPr>
+          <p:cNvPr id="113" name="肘形连接符 112">
+            <a:extLst>
+              <a:ext uri="{FF2B5EF4-FFF2-40B4-BE49-F238E27FC236}">
+                <a16:creationId xmlns:a16="http://schemas.microsoft.com/office/drawing/2014/main" id="{61718D18-2147-EA42-B84D-21E3BE37294D}"/>
+              </a:ext>
+            </a:extLst>
+          </p:cNvPr>
+          <p:cNvCxnSpPr>
+            <a:cxnSpLocks/>
+            <a:stCxn id="16" idx="3"/>
+            <a:endCxn id="41" idx="1"/>
+          </p:cNvCxnSpPr>
+          <p:nvPr/>
+        </p:nvCxnSpPr>
+        <p:spPr>
+          <a:xfrm>
+            <a:off x="2147535" y="2779460"/>
+            <a:ext cx="970939" cy="1171913"/>
+          </a:xfrm>
+          <a:prstGeom prst="bentConnector3">
+            <a:avLst>
+              <a:gd name="adj1" fmla="val 54366"/>
+            </a:avLst>
+          </a:prstGeom>
+          <a:ln w="19050">
+            <a:solidFill>
+              <a:schemeClr val="accent1">
+                <a:lumMod val="50000"/>
+              </a:schemeClr>
+            </a:solidFill>
+            <a:tailEnd type="triangle"/>
+          </a:ln>
+        </p:spPr>
+        <p:style>
+          <a:lnRef idx="1">
+            <a:schemeClr val="accent1"/>
+          </a:lnRef>
+          <a:fillRef idx="0">
+            <a:schemeClr val="accent1"/>
+          </a:fillRef>
+          <a:effectRef idx="0">
+            <a:schemeClr val="accent1"/>
+          </a:effectRef>
+          <a:fontRef idx="minor">
+            <a:schemeClr val="tx1"/>
+          </a:fontRef>
+        </p:style>
+      </p:cxnSp>
+      <p:cxnSp>
+        <p:nvCxnSpPr>
+          <p:cNvPr id="118" name="直线箭头连接符 117">
+            <a:extLst>
+              <a:ext uri="{FF2B5EF4-FFF2-40B4-BE49-F238E27FC236}">
+                <a16:creationId xmlns:a16="http://schemas.microsoft.com/office/drawing/2014/main" id="{939965DE-8A4F-DE40-A210-D2F1ED9FE51F}"/>
+              </a:ext>
+            </a:extLst>
+          </p:cNvPr>
+          <p:cNvCxnSpPr>
+            <a:cxnSpLocks/>
+            <a:stCxn id="41" idx="3"/>
+            <a:endCxn id="29" idx="1"/>
+          </p:cNvCxnSpPr>
+          <p:nvPr/>
+        </p:nvCxnSpPr>
+        <p:spPr>
+          <a:xfrm flipV="1">
+            <a:off x="4913222" y="3951372"/>
+            <a:ext cx="855577" cy="1"/>
+          </a:xfrm>
+          <a:prstGeom prst="straightConnector1">
+            <a:avLst/>
+          </a:prstGeom>
+          <a:ln w="19050">
+            <a:solidFill>
+              <a:schemeClr val="accent1">
+                <a:lumMod val="50000"/>
+              </a:schemeClr>
+            </a:solidFill>
+            <a:tailEnd type="triangle"/>
+          </a:ln>
+        </p:spPr>
+        <p:style>
+          <a:lnRef idx="1">
+            <a:schemeClr val="accent1"/>
+          </a:lnRef>
+          <a:fillRef idx="0">
+            <a:schemeClr val="accent1"/>
+          </a:fillRef>
+          <a:effectRef idx="0">
+            <a:schemeClr val="accent1"/>
+          </a:effectRef>
+          <a:fontRef idx="minor">
+            <a:schemeClr val="tx1"/>
+          </a:fontRef>
+        </p:style>
+      </p:cxnSp>
+      <p:cxnSp>
+        <p:nvCxnSpPr>
+          <p:cNvPr id="122" name="直线箭头连接符 121">
+            <a:extLst>
+              <a:ext uri="{FF2B5EF4-FFF2-40B4-BE49-F238E27FC236}">
+                <a16:creationId xmlns:a16="http://schemas.microsoft.com/office/drawing/2014/main" id="{A650DCB1-E020-8F43-9BC2-8493DF7C975B}"/>
+              </a:ext>
+            </a:extLst>
+          </p:cNvPr>
+          <p:cNvCxnSpPr>
+            <a:cxnSpLocks/>
+            <a:stCxn id="4" idx="3"/>
+            <a:endCxn id="5" idx="1"/>
+          </p:cNvCxnSpPr>
+          <p:nvPr/>
+        </p:nvCxnSpPr>
+        <p:spPr>
+          <a:xfrm>
+            <a:off x="4848135" y="1618806"/>
+            <a:ext cx="1001602" cy="0"/>
+          </a:xfrm>
+          <a:prstGeom prst="straightConnector1">
+            <a:avLst/>
+          </a:prstGeom>
+          <a:ln w="19050">
+            <a:solidFill>
+              <a:schemeClr val="accent1">
+                <a:lumMod val="50000"/>
+              </a:schemeClr>
+            </a:solidFill>
+            <a:tailEnd type="triangle"/>
+          </a:ln>
+        </p:spPr>
+        <p:style>
+          <a:lnRef idx="1">
+            <a:schemeClr val="accent1"/>
+          </a:lnRef>
+          <a:fillRef idx="0">
+            <a:schemeClr val="accent1"/>
+          </a:fillRef>
+          <a:effectRef idx="0">
+            <a:schemeClr val="accent1"/>
+          </a:effectRef>
+          <a:fontRef idx="minor">
+            <a:schemeClr val="tx1"/>
+          </a:fontRef>
+        </p:style>
+      </p:cxnSp>
+      <p:cxnSp>
+        <p:nvCxnSpPr>
+          <p:cNvPr id="125" name="肘形连接符 124">
+            <a:extLst>
+              <a:ext uri="{FF2B5EF4-FFF2-40B4-BE49-F238E27FC236}">
+                <a16:creationId xmlns:a16="http://schemas.microsoft.com/office/drawing/2014/main" id="{F40ECFBE-F88E-C142-8F49-EADD9169E12D}"/>
+              </a:ext>
+            </a:extLst>
+          </p:cNvPr>
+          <p:cNvCxnSpPr>
+            <a:cxnSpLocks/>
+            <a:stCxn id="5" idx="3"/>
+            <a:endCxn id="215" idx="1"/>
+          </p:cNvCxnSpPr>
+          <p:nvPr/>
+        </p:nvCxnSpPr>
+        <p:spPr>
+          <a:xfrm>
+            <a:off x="7409875" y="1618806"/>
+            <a:ext cx="2310581" cy="1188924"/>
+          </a:xfrm>
+          <a:prstGeom prst="bentConnector3">
+            <a:avLst>
+              <a:gd name="adj1" fmla="val 59435"/>
+            </a:avLst>
+          </a:prstGeom>
+          <a:ln w="19050">
+            <a:solidFill>
+              <a:schemeClr val="accent1">
+                <a:lumMod val="50000"/>
+              </a:schemeClr>
+            </a:solidFill>
+            <a:tailEnd type="triangle"/>
+          </a:ln>
+        </p:spPr>
+        <p:style>
+          <a:lnRef idx="1">
+            <a:schemeClr val="accent1"/>
+          </a:lnRef>
+          <a:fillRef idx="0">
+            <a:schemeClr val="accent1"/>
+          </a:fillRef>
+          <a:effectRef idx="0">
+            <a:schemeClr val="accent1"/>
+          </a:effectRef>
+          <a:fontRef idx="minor">
+            <a:schemeClr val="tx1"/>
+          </a:fontRef>
+        </p:style>
+      </p:cxnSp>
+      <p:cxnSp>
+        <p:nvCxnSpPr>
+          <p:cNvPr id="128" name="肘形连接符 127">
+            <a:extLst>
+              <a:ext uri="{FF2B5EF4-FFF2-40B4-BE49-F238E27FC236}">
+                <a16:creationId xmlns:a16="http://schemas.microsoft.com/office/drawing/2014/main" id="{FCB9D92E-8D6F-4A4A-9725-BCDB426A8E64}"/>
+              </a:ext>
+            </a:extLst>
+          </p:cNvPr>
+          <p:cNvCxnSpPr>
+            <a:cxnSpLocks/>
+            <a:stCxn id="29" idx="3"/>
+            <a:endCxn id="215" idx="1"/>
+          </p:cNvCxnSpPr>
+          <p:nvPr/>
+        </p:nvCxnSpPr>
+        <p:spPr>
+          <a:xfrm flipV="1">
+            <a:off x="7409875" y="2807730"/>
+            <a:ext cx="2310581" cy="1143642"/>
+          </a:xfrm>
+          <a:prstGeom prst="bentConnector3">
+            <a:avLst>
+              <a:gd name="adj1" fmla="val 59435"/>
+            </a:avLst>
+          </a:prstGeom>
+          <a:ln w="19050">
+            <a:solidFill>
+              <a:schemeClr val="accent1">
+                <a:lumMod val="50000"/>
+              </a:schemeClr>
+            </a:solidFill>
+            <a:tailEnd type="triangle"/>
+          </a:ln>
+        </p:spPr>
+        <p:style>
+          <a:lnRef idx="1">
+            <a:schemeClr val="accent1"/>
+          </a:lnRef>
+          <a:fillRef idx="0">
+            <a:schemeClr val="accent1"/>
+          </a:fillRef>
+          <a:effectRef idx="0">
+            <a:schemeClr val="accent1"/>
+          </a:effectRef>
+          <a:fontRef idx="minor">
+            <a:schemeClr val="tx1"/>
+          </a:fontRef>
+        </p:style>
+      </p:cxnSp>
+      <p:cxnSp>
+        <p:nvCxnSpPr>
+          <p:cNvPr id="179" name="曲线连接符 178">
+            <a:extLst>
+              <a:ext uri="{FF2B5EF4-FFF2-40B4-BE49-F238E27FC236}">
+                <a16:creationId xmlns:a16="http://schemas.microsoft.com/office/drawing/2014/main" id="{372C4E01-6DA8-9F43-A226-6782089B2F8A}"/>
+              </a:ext>
+            </a:extLst>
+          </p:cNvPr>
+          <p:cNvCxnSpPr>
+            <a:stCxn id="16" idx="3"/>
+            <a:endCxn id="29" idx="0"/>
+          </p:cNvCxnSpPr>
+          <p:nvPr/>
+        </p:nvCxnSpPr>
+        <p:spPr>
+          <a:xfrm>
+            <a:off x="2147535" y="2779460"/>
+            <a:ext cx="4441802" cy="769212"/>
+          </a:xfrm>
+          <a:prstGeom prst="curvedConnector2">
+            <a:avLst/>
+          </a:prstGeom>
+          <a:ln w="19050">
+            <a:solidFill>
+              <a:schemeClr val="accent1">
+                <a:lumMod val="50000"/>
+              </a:schemeClr>
+            </a:solidFill>
+            <a:tailEnd type="triangle"/>
+          </a:ln>
+        </p:spPr>
+        <p:style>
+          <a:lnRef idx="1">
+            <a:schemeClr val="accent1"/>
+          </a:lnRef>
+          <a:fillRef idx="0">
+            <a:schemeClr val="accent1"/>
+          </a:fillRef>
+          <a:effectRef idx="0">
+            <a:schemeClr val="accent1"/>
+          </a:effectRef>
+          <a:fontRef idx="minor">
+            <a:schemeClr val="tx1"/>
+          </a:fontRef>
+        </p:style>
+      </p:cxnSp>
+      <p:cxnSp>
+        <p:nvCxnSpPr>
+          <p:cNvPr id="180" name="曲线连接符 179">
+            <a:extLst>
+              <a:ext uri="{FF2B5EF4-FFF2-40B4-BE49-F238E27FC236}">
+                <a16:creationId xmlns:a16="http://schemas.microsoft.com/office/drawing/2014/main" id="{703C7B30-4F93-2847-803B-41BD2B3D7665}"/>
+              </a:ext>
+            </a:extLst>
+          </p:cNvPr>
+          <p:cNvCxnSpPr>
+            <a:cxnSpLocks/>
+            <a:stCxn id="16" idx="3"/>
+            <a:endCxn id="5" idx="2"/>
+          </p:cNvCxnSpPr>
+          <p:nvPr/>
+        </p:nvCxnSpPr>
+        <p:spPr>
+          <a:xfrm flipV="1">
+            <a:off x="2147535" y="2021505"/>
+            <a:ext cx="4482271" cy="757955"/>
+          </a:xfrm>
+          <a:prstGeom prst="curvedConnector2">
+            <a:avLst/>
+          </a:prstGeom>
+          <a:ln w="19050">
+            <a:solidFill>
+              <a:schemeClr val="accent1">
+                <a:lumMod val="50000"/>
+              </a:schemeClr>
+            </a:solidFill>
+            <a:tailEnd type="triangle"/>
+          </a:ln>
+        </p:spPr>
+        <p:style>
+          <a:lnRef idx="1">
+            <a:schemeClr val="accent1"/>
+          </a:lnRef>
+          <a:fillRef idx="0">
+            <a:schemeClr val="accent1"/>
+          </a:fillRef>
+          <a:effectRef idx="0">
+            <a:schemeClr val="accent1"/>
+          </a:effectRef>
+          <a:fontRef idx="minor">
+            <a:schemeClr val="tx1"/>
+          </a:fontRef>
+        </p:style>
+      </p:cxnSp>
+      <p:sp>
+        <p:nvSpPr>
+          <p:cNvPr id="185" name="文本框 184">
+            <a:extLst>
+              <a:ext uri="{FF2B5EF4-FFF2-40B4-BE49-F238E27FC236}">
+                <a16:creationId xmlns:a16="http://schemas.microsoft.com/office/drawing/2014/main" id="{23CEA022-C088-E64E-8C53-2EB1B0F073AB}"/>
+              </a:ext>
+            </a:extLst>
+          </p:cNvPr>
+          <p:cNvSpPr txBox="1"/>
+          <p:nvPr/>
+        </p:nvSpPr>
+        <p:spPr>
+          <a:xfrm>
+            <a:off x="7377503" y="3983460"/>
+            <a:ext cx="799707" cy="584775"/>
+          </a:xfrm>
+          <a:prstGeom prst="rect">
+            <a:avLst/>
+          </a:prstGeom>
+          <a:noFill/>
+        </p:spPr>
+        <p:txBody>
+          <a:bodyPr wrap="square">
+            <a:spAutoFit/>
+          </a:bodyPr>
+          <a:lstStyle/>
+          <a:p>
+            <a:pPr algn="ctr"/>
+            <a:r>
+              <a:rPr kumimoji="1" lang="zh-CN" altLang="en-US" sz="1600" dirty="0">
+                <a:latin typeface="Times New Roman" panose="02020603050405020304" pitchFamily="18" charset="0"/>
+                <a:ea typeface="SimSun" panose="02010600030101010101" pitchFamily="2" charset="-122"/>
+                <a:cs typeface="Times New Roman" panose="02020603050405020304" pitchFamily="18" charset="0"/>
+              </a:rPr>
+              <a:t>设计</a:t>
+            </a:r>
+            <a:endParaRPr kumimoji="1" lang="en-US" altLang="zh-CN" sz="1600" dirty="0">
+              <a:latin typeface="Times New Roman" panose="02020603050405020304" pitchFamily="18" charset="0"/>
+              <a:ea typeface="SimSun" panose="02010600030101010101" pitchFamily="2" charset="-122"/>
+              <a:cs typeface="Times New Roman" panose="02020603050405020304" pitchFamily="18" charset="0"/>
+            </a:endParaRPr>
+          </a:p>
+          <a:p>
+            <a:pPr algn="ctr"/>
+            <a:r>
+              <a:rPr kumimoji="1" lang="zh-CN" altLang="en-US" sz="1600" dirty="0">
+                <a:latin typeface="Times New Roman" panose="02020603050405020304" pitchFamily="18" charset="0"/>
+                <a:ea typeface="SimSun" panose="02010600030101010101" pitchFamily="2" charset="-122"/>
+                <a:cs typeface="Times New Roman" panose="02020603050405020304" pitchFamily="18" charset="0"/>
+              </a:rPr>
+              <a:t>参数</a:t>
+            </a:r>
+          </a:p>
+        </p:txBody>
+      </p:sp>
+      <p:sp>
+        <p:nvSpPr>
+          <p:cNvPr id="186" name="文本框 185">
+            <a:extLst>
+              <a:ext uri="{FF2B5EF4-FFF2-40B4-BE49-F238E27FC236}">
+                <a16:creationId xmlns:a16="http://schemas.microsoft.com/office/drawing/2014/main" id="{0D15B0E3-1613-4643-8B02-3351907ECD7A}"/>
+              </a:ext>
+            </a:extLst>
+          </p:cNvPr>
+          <p:cNvSpPr txBox="1"/>
+          <p:nvPr/>
+        </p:nvSpPr>
+        <p:spPr>
+          <a:xfrm>
+            <a:off x="4827904" y="3990766"/>
+            <a:ext cx="799707" cy="584775"/>
+          </a:xfrm>
+          <a:prstGeom prst="rect">
+            <a:avLst/>
+          </a:prstGeom>
+          <a:noFill/>
+        </p:spPr>
+        <p:txBody>
+          <a:bodyPr wrap="square">
+            <a:spAutoFit/>
+          </a:bodyPr>
+          <a:lstStyle/>
+          <a:p>
+            <a:pPr algn="ctr"/>
+            <a:r>
+              <a:rPr kumimoji="1" lang="zh-CN" altLang="en-US" sz="1600" dirty="0">
+                <a:latin typeface="Times New Roman" panose="02020603050405020304" pitchFamily="18" charset="0"/>
+                <a:ea typeface="SimSun" panose="02010600030101010101" pitchFamily="2" charset="-122"/>
+                <a:cs typeface="Times New Roman" panose="02020603050405020304" pitchFamily="18" charset="0"/>
+              </a:rPr>
+              <a:t>身体</a:t>
+            </a:r>
+            <a:endParaRPr kumimoji="1" lang="en-US" altLang="zh-CN" sz="1600" dirty="0">
+              <a:latin typeface="Times New Roman" panose="02020603050405020304" pitchFamily="18" charset="0"/>
+              <a:ea typeface="SimSun" panose="02010600030101010101" pitchFamily="2" charset="-122"/>
+              <a:cs typeface="Times New Roman" panose="02020603050405020304" pitchFamily="18" charset="0"/>
+            </a:endParaRPr>
+          </a:p>
+          <a:p>
+            <a:pPr algn="ctr"/>
+            <a:r>
+              <a:rPr kumimoji="1" lang="zh-CN" altLang="en-US" sz="1600" dirty="0">
+                <a:latin typeface="Times New Roman" panose="02020603050405020304" pitchFamily="18" charset="0"/>
+                <a:ea typeface="SimSun" panose="02010600030101010101" pitchFamily="2" charset="-122"/>
+                <a:cs typeface="Times New Roman" panose="02020603050405020304" pitchFamily="18" charset="0"/>
+              </a:rPr>
+              <a:t>参数</a:t>
+            </a:r>
+          </a:p>
+        </p:txBody>
+      </p:sp>
+      <p:sp>
+        <p:nvSpPr>
+          <p:cNvPr id="201" name="文本框 200">
+            <a:extLst>
+              <a:ext uri="{FF2B5EF4-FFF2-40B4-BE49-F238E27FC236}">
+                <a16:creationId xmlns:a16="http://schemas.microsoft.com/office/drawing/2014/main" id="{CD30DE4E-DD8E-0748-A7B5-0637C18DC85F}"/>
+              </a:ext>
+            </a:extLst>
+          </p:cNvPr>
+          <p:cNvSpPr txBox="1"/>
+          <p:nvPr/>
+        </p:nvSpPr>
+        <p:spPr>
+          <a:xfrm>
+            <a:off x="612818" y="3814183"/>
+            <a:ext cx="1387608" cy="338554"/>
+          </a:xfrm>
+          <a:prstGeom prst="rect">
+            <a:avLst/>
+          </a:prstGeom>
+          <a:noFill/>
+        </p:spPr>
+        <p:txBody>
+          <a:bodyPr wrap="square">
+            <a:spAutoFit/>
+          </a:bodyPr>
+          <a:lstStyle/>
+          <a:p>
+            <a:pPr algn="ctr"/>
+            <a:r>
+              <a:rPr kumimoji="1" lang="zh-CN" altLang="en-US" sz="1600" dirty="0">
+                <a:latin typeface="Times New Roman" panose="02020603050405020304" pitchFamily="18" charset="0"/>
+                <a:ea typeface="SimSun" panose="02010600030101010101" pitchFamily="2" charset="-122"/>
+                <a:cs typeface="Times New Roman" panose="02020603050405020304" pitchFamily="18" charset="0"/>
+              </a:rPr>
+              <a:t>输入图像</a:t>
+            </a:r>
+          </a:p>
+        </p:txBody>
+      </p:sp>
+      <p:sp>
+        <p:nvSpPr>
+          <p:cNvPr id="206" name="文本框 205">
+            <a:extLst>
+              <a:ext uri="{FF2B5EF4-FFF2-40B4-BE49-F238E27FC236}">
+                <a16:creationId xmlns:a16="http://schemas.microsoft.com/office/drawing/2014/main" id="{77570C01-3849-FB46-B67F-2742B0400BC7}"/>
+              </a:ext>
+            </a:extLst>
+          </p:cNvPr>
+          <p:cNvSpPr txBox="1"/>
+          <p:nvPr/>
+        </p:nvSpPr>
+        <p:spPr>
+          <a:xfrm>
+            <a:off x="4634158" y="666570"/>
+            <a:ext cx="1763901" cy="338554"/>
+          </a:xfrm>
+          <a:prstGeom prst="rect">
+            <a:avLst/>
+          </a:prstGeom>
+          <a:noFill/>
+        </p:spPr>
+        <p:txBody>
+          <a:bodyPr wrap="square">
+            <a:spAutoFit/>
+          </a:bodyPr>
+          <a:lstStyle/>
+          <a:p>
+            <a:pPr algn="ctr"/>
+            <a:r>
+              <a:rPr kumimoji="1" lang="en-US" altLang="zh-CN" sz="1600" b="1" dirty="0">
+                <a:latin typeface="Times New Roman" panose="02020603050405020304" pitchFamily="18" charset="0"/>
+                <a:ea typeface="SimSun" panose="02010600030101010101" pitchFamily="2" charset="-122"/>
+                <a:cs typeface="Times New Roman" panose="02020603050405020304" pitchFamily="18" charset="0"/>
+              </a:rPr>
+              <a:t>(a)</a:t>
+            </a:r>
+            <a:r>
+              <a:rPr kumimoji="1" lang="zh-CN" altLang="en-US" sz="1600" b="1" dirty="0">
+                <a:latin typeface="Times New Roman" panose="02020603050405020304" pitchFamily="18" charset="0"/>
+                <a:ea typeface="SimSun" panose="02010600030101010101" pitchFamily="2" charset="-122"/>
+                <a:cs typeface="Times New Roman" panose="02020603050405020304" pitchFamily="18" charset="0"/>
+              </a:rPr>
+              <a:t> 现有方法范式</a:t>
+            </a:r>
+          </a:p>
+        </p:txBody>
+      </p:sp>
+      <p:sp>
+        <p:nvSpPr>
+          <p:cNvPr id="208" name="文本框 207">
+            <a:extLst>
+              <a:ext uri="{FF2B5EF4-FFF2-40B4-BE49-F238E27FC236}">
+                <a16:creationId xmlns:a16="http://schemas.microsoft.com/office/drawing/2014/main" id="{5801D857-3ACA-EA44-8730-17E5B64D8DE8}"/>
+              </a:ext>
+            </a:extLst>
+          </p:cNvPr>
+          <p:cNvSpPr txBox="1"/>
+          <p:nvPr/>
+        </p:nvSpPr>
+        <p:spPr>
+          <a:xfrm>
+            <a:off x="4557819" y="4751717"/>
+            <a:ext cx="1763901" cy="338554"/>
+          </a:xfrm>
+          <a:prstGeom prst="rect">
+            <a:avLst/>
+          </a:prstGeom>
+          <a:noFill/>
+        </p:spPr>
+        <p:txBody>
+          <a:bodyPr wrap="square">
+            <a:spAutoFit/>
+          </a:bodyPr>
+          <a:lstStyle/>
+          <a:p>
+            <a:pPr algn="ctr"/>
+            <a:r>
+              <a:rPr kumimoji="1" lang="en-US" altLang="zh-CN" sz="1600" b="1" dirty="0">
+                <a:latin typeface="Times New Roman" panose="02020603050405020304" pitchFamily="18" charset="0"/>
+                <a:ea typeface="SimSun" panose="02010600030101010101" pitchFamily="2" charset="-122"/>
+                <a:cs typeface="Times New Roman" panose="02020603050405020304" pitchFamily="18" charset="0"/>
+              </a:rPr>
+              <a:t>(b)</a:t>
+            </a:r>
+            <a:r>
+              <a:rPr kumimoji="1" lang="zh-CN" altLang="en-US" sz="1600" b="1" dirty="0">
+                <a:latin typeface="Times New Roman" panose="02020603050405020304" pitchFamily="18" charset="0"/>
+                <a:ea typeface="SimSun" panose="02010600030101010101" pitchFamily="2" charset="-122"/>
+                <a:cs typeface="Times New Roman" panose="02020603050405020304" pitchFamily="18" charset="0"/>
+              </a:rPr>
+              <a:t> 本章方法范式</a:t>
+            </a:r>
+          </a:p>
+        </p:txBody>
+      </p:sp>
+      <p:pic>
+        <p:nvPicPr>
+          <p:cNvPr id="215" name="图片 214">
+            <a:extLst>
+              <a:ext uri="{FF2B5EF4-FFF2-40B4-BE49-F238E27FC236}">
+                <a16:creationId xmlns:a16="http://schemas.microsoft.com/office/drawing/2014/main" id="{61D434D5-2423-744E-A7F4-035A2109B784}"/>
               </a:ext>
             </a:extLst>
           </p:cNvPr>
@@ -3336,25 +4518,65 @@
           <p:nvPr/>
         </p:nvPicPr>
         <p:blipFill>
-          <a:blip r:embed="rId2"/>
+          <a:blip r:embed="rId3"/>
           <a:stretch>
             <a:fillRect/>
           </a:stretch>
         </p:blipFill>
         <p:spPr>
           <a:xfrm>
-            <a:off x="-40635" y="0"/>
-            <a:ext cx="12273270" cy="6956385"/>
+            <a:off x="9720456" y="2000174"/>
+            <a:ext cx="1485557" cy="1615111"/>
           </a:xfrm>
           <a:prstGeom prst="rect">
             <a:avLst/>
           </a:prstGeom>
         </p:spPr>
       </p:pic>
+      <p:sp>
+        <p:nvSpPr>
+          <p:cNvPr id="224" name="文本框 223">
+            <a:extLst>
+              <a:ext uri="{FF2B5EF4-FFF2-40B4-BE49-F238E27FC236}">
+                <a16:creationId xmlns:a16="http://schemas.microsoft.com/office/drawing/2014/main" id="{EF6C0CAB-5A85-444D-8527-C5F7F3309F1F}"/>
+              </a:ext>
+            </a:extLst>
+          </p:cNvPr>
+          <p:cNvSpPr txBox="1"/>
+          <p:nvPr/>
+        </p:nvSpPr>
+        <p:spPr>
+          <a:xfrm>
+            <a:off x="9582767" y="3628862"/>
+            <a:ext cx="1623246" cy="338554"/>
+          </a:xfrm>
+          <a:prstGeom prst="rect">
+            <a:avLst/>
+          </a:prstGeom>
+          <a:noFill/>
+        </p:spPr>
+        <p:txBody>
+          <a:bodyPr wrap="square">
+            <a:spAutoFit/>
+          </a:bodyPr>
+          <a:lstStyle/>
+          <a:p>
+            <a:pPr algn="ctr"/>
+            <a:r>
+              <a:rPr kumimoji="1" lang="zh-CN" altLang="en-US" sz="1600" dirty="0">
+                <a:latin typeface="Times New Roman" panose="02020603050405020304" pitchFamily="18" charset="0"/>
+                <a:ea typeface="SimSun" panose="02010600030101010101" pitchFamily="2" charset="-122"/>
+                <a:cs typeface="Times New Roman" panose="02020603050405020304" pitchFamily="18" charset="0"/>
+              </a:rPr>
+              <a:t>参数化服装表示</a:t>
+            </a:r>
+          </a:p>
+        </p:txBody>
+      </p:sp>
     </p:spTree>
     <p:extLst>
       <p:ext uri="{BB962C8B-B14F-4D97-AF65-F5344CB8AC3E}">
-        <p14:creationId xmlns:p14="http://schemas.microsoft.com/office/powerpoint/2010/main" val="846828323"/>
+        <p14:creationId xmlns:p14="http://schemas.microsoft.com/office/powerpoint/2010/main" val="76997261"/>
       </p:ext>
     </p:extLst>
   </p:cSld>
